--- a/entregas/posts/site/kit/editavel/efeito-rebote-qua-21-10.pptx
+++ b/entregas/posts/site/kit/editavel/efeito-rebote-qua-21-10.pptx
@@ -3820,7 +3820,7 @@
         </p:nvSpPr>
         <p:spPr>
           <a:xfrm>
-            <a:off x="915442" y="789152"/>
+            <a:off x="915442" y="866305"/>
             <a:ext cx="8383384" cy="447484"/>
           </a:xfrm>
           <a:prstGeom prst="rect">
@@ -3867,7 +3867,7 @@
         </p:nvSpPr>
         <p:spPr>
           <a:xfrm>
-            <a:off x="1326803" y="9758265"/>
+            <a:off x="1326803" y="9590793"/>
             <a:ext cx="6362864" cy="746013"/>
           </a:xfrm>
           <a:prstGeom prst="rect">
@@ -3914,7 +3914,7 @@
         </p:nvSpPr>
         <p:spPr>
           <a:xfrm>
-            <a:off x="1326803" y="10541487"/>
+            <a:off x="1326803" y="10604443"/>
             <a:ext cx="6675910" cy="965332"/>
           </a:xfrm>
           <a:prstGeom prst="rect">
@@ -4472,7 +4472,7 @@
         </p:nvSpPr>
         <p:spPr>
           <a:xfrm>
-            <a:off x="915442" y="1079840"/>
+            <a:off x="915442" y="1018941"/>
             <a:ext cx="3480078" cy="304495"/>
           </a:xfrm>
           <a:prstGeom prst="rect">
@@ -4498,13 +4498,13 @@
               </a:spcAft>
             </a:pPr>
             <a:r>
-              <a:rPr b="0" i="0" sz="2397" lang="pt-BR">
+              <a:rPr b="1" i="0" sz="2397" lang="pt-BR">
                 <a:solidFill>
                   <a:srgbClr val="B5121B"/>
                 </a:solidFill>
-                <a:latin typeface="Barlow SemiBold"/>
-                <a:ea typeface="Barlow SemiBold"/>
-                <a:cs typeface="Barlow SemiBold"/>
+                <a:latin typeface="Barlow"/>
+                <a:ea typeface="Barlow"/>
+                <a:cs typeface="Barlow"/>
               </a:rPr>
               <a:t>Como nos organizamos</a:t>
             </a:r>
@@ -4519,7 +4519,7 @@
         </p:nvSpPr>
         <p:spPr>
           <a:xfrm>
-            <a:off x="915442" y="1848566"/>
+            <a:off x="915442" y="1638998"/>
             <a:ext cx="8244557" cy="933524"/>
           </a:xfrm>
           <a:prstGeom prst="rect">
@@ -4566,7 +4566,7 @@
         </p:nvSpPr>
         <p:spPr>
           <a:xfrm>
-            <a:off x="1488378" y="3229445"/>
+            <a:off x="1488378" y="3458845"/>
             <a:ext cx="195218" cy="686143"/>
           </a:xfrm>
           <a:prstGeom prst="rect">
@@ -4613,7 +4613,7 @@
         </p:nvSpPr>
         <p:spPr>
           <a:xfrm>
-            <a:off x="2175867" y="3404274"/>
+            <a:off x="2175867" y="3444290"/>
             <a:ext cx="2675766" cy="520214"/>
           </a:xfrm>
           <a:prstGeom prst="rect">
@@ -4660,7 +4660,7 @@
         </p:nvSpPr>
         <p:spPr>
           <a:xfrm>
-            <a:off x="1456283" y="4694212"/>
+            <a:off x="1456283" y="4923612"/>
             <a:ext cx="259556" cy="686143"/>
           </a:xfrm>
           <a:prstGeom prst="rect">
@@ -4707,7 +4707,7 @@
         </p:nvSpPr>
         <p:spPr>
           <a:xfrm>
-            <a:off x="2175867" y="4869040"/>
+            <a:off x="2175867" y="4909057"/>
             <a:ext cx="1620813" cy="520214"/>
           </a:xfrm>
           <a:prstGeom prst="rect">
@@ -4754,7 +4754,7 @@
         </p:nvSpPr>
         <p:spPr>
           <a:xfrm>
-            <a:off x="1456618" y="6158978"/>
+            <a:off x="1456618" y="6388378"/>
             <a:ext cx="258738" cy="686143"/>
           </a:xfrm>
           <a:prstGeom prst="rect">
@@ -4801,7 +4801,7 @@
         </p:nvSpPr>
         <p:spPr>
           <a:xfrm>
-            <a:off x="2175867" y="6333807"/>
+            <a:off x="2175867" y="6373823"/>
             <a:ext cx="1804824" cy="520214"/>
           </a:xfrm>
           <a:prstGeom prst="rect">
@@ -4848,7 +4848,7 @@
         </p:nvSpPr>
         <p:spPr>
           <a:xfrm>
-            <a:off x="1446624" y="7623745"/>
+            <a:off x="1446624" y="7853145"/>
             <a:ext cx="278874" cy="686143"/>
           </a:xfrm>
           <a:prstGeom prst="rect">
@@ -4895,7 +4895,7 @@
         </p:nvSpPr>
         <p:spPr>
           <a:xfrm>
-            <a:off x="2175867" y="7798573"/>
+            <a:off x="2175867" y="7838590"/>
             <a:ext cx="2106707" cy="520214"/>
           </a:xfrm>
           <a:prstGeom prst="rect">
@@ -4942,7 +4942,7 @@
         </p:nvSpPr>
         <p:spPr>
           <a:xfrm>
-            <a:off x="1455963" y="9088511"/>
+            <a:off x="1455963" y="9317911"/>
             <a:ext cx="260047" cy="686143"/>
           </a:xfrm>
           <a:prstGeom prst="rect">
@@ -4989,7 +4989,7 @@
         </p:nvSpPr>
         <p:spPr>
           <a:xfrm>
-            <a:off x="2175867" y="9263340"/>
+            <a:off x="2175867" y="9303356"/>
             <a:ext cx="1634564" cy="520214"/>
           </a:xfrm>
           <a:prstGeom prst="rect">
@@ -5036,7 +5036,7 @@
         </p:nvSpPr>
         <p:spPr>
           <a:xfrm>
-            <a:off x="1243012" y="10645209"/>
+            <a:off x="1243012" y="10685225"/>
             <a:ext cx="8192170" cy="520214"/>
           </a:xfrm>
           <a:prstGeom prst="rect">
@@ -5083,7 +5083,7 @@
         </p:nvSpPr>
         <p:spPr>
           <a:xfrm>
-            <a:off x="915442" y="11855560"/>
+            <a:off x="915442" y="11836529"/>
             <a:ext cx="3156421" cy="437712"/>
           </a:xfrm>
           <a:prstGeom prst="rect">
@@ -5203,7 +5203,7 @@
         </p:nvSpPr>
         <p:spPr>
           <a:xfrm>
-            <a:off x="915442" y="789152"/>
+            <a:off x="915442" y="866305"/>
             <a:ext cx="7403574" cy="447484"/>
           </a:xfrm>
           <a:prstGeom prst="rect">
@@ -5250,7 +5250,7 @@
         </p:nvSpPr>
         <p:spPr>
           <a:xfrm>
-            <a:off x="1326803" y="9758265"/>
+            <a:off x="1326803" y="9590793"/>
             <a:ext cx="6295087" cy="746013"/>
           </a:xfrm>
           <a:prstGeom prst="rect">
@@ -5297,7 +5297,7 @@
         </p:nvSpPr>
         <p:spPr>
           <a:xfrm>
-            <a:off x="1326803" y="10541487"/>
+            <a:off x="1326803" y="10604443"/>
             <a:ext cx="7805516" cy="965332"/>
           </a:xfrm>
           <a:prstGeom prst="rect">
@@ -5425,7 +5425,7 @@
         </p:nvSpPr>
         <p:spPr>
           <a:xfrm>
-            <a:off x="4466436" y="5430830"/>
+            <a:off x="4466436" y="5369931"/>
             <a:ext cx="1354128" cy="304495"/>
           </a:xfrm>
           <a:prstGeom prst="rect">
@@ -5451,13 +5451,13 @@
               </a:spcAft>
             </a:pPr>
             <a:r>
-              <a:rPr b="0" i="0" sz="2397" lang="pt-BR">
+              <a:rPr b="1" i="0" sz="2397" lang="pt-BR">
                 <a:solidFill>
                   <a:srgbClr val="E9C46A"/>
                 </a:solidFill>
-                <a:latin typeface="Barlow SemiBold"/>
-                <a:ea typeface="Barlow SemiBold"/>
-                <a:cs typeface="Barlow SemiBold"/>
+                <a:latin typeface="Barlow"/>
+                <a:ea typeface="Barlow"/>
+                <a:cs typeface="Barlow"/>
               </a:rPr>
               <a:t>Na sexta</a:t>
             </a:r>
@@ -5472,7 +5472,7 @@
         </p:nvSpPr>
         <p:spPr>
           <a:xfrm>
-            <a:off x="2025015" y="6199556"/>
+            <a:off x="2025015" y="5989989"/>
             <a:ext cx="6236970" cy="1867049"/>
           </a:xfrm>
           <a:prstGeom prst="rect">
@@ -5531,7 +5531,7 @@
         </p:nvSpPr>
         <p:spPr>
           <a:xfrm>
-            <a:off x="2531872" y="8670860"/>
+            <a:off x="2531872" y="8572105"/>
             <a:ext cx="5223108" cy="493776"/>
           </a:xfrm>
           <a:prstGeom prst="rect">
